--- a/01_개발자환경구축_HongEunKyeong.pptx
+++ b/01_개발자환경구축_HongEunKyeong.pptx
@@ -1551,7 +1551,7 @@
           <a:bodyPr/>
           <a:lstStyle/>
           <a:p>
-            <a:endParaRPr lang="ko-KR" altLang="en-US"/>
+            <a:endParaRPr lang="ko-KR" altLang="en-US" dirty="0"/>
           </a:p>
         </p:txBody>
       </p:sp>
@@ -1591,7 +1591,7 @@
               <a:t>Branch 이름 (영문) : </a:t>
             </a:r>
             <a:r>
-              <a:rPr lang="ko-KR" altLang="en-US" sz="1300" dirty="0">
+              <a:rPr lang="en-US" sz="1300" dirty="0" err="1">
                 <a:solidFill>
                   <a:srgbClr val="444444"/>
                 </a:solidFill>
@@ -1599,18 +1599,7 @@
                 <a:ea typeface="맑은 고딕" pitchFamily="34" charset="-122"/>
                 <a:cs typeface="맑은 고딕" pitchFamily="34" charset="-120"/>
               </a:rPr>
-              <a:t> </a:t>
-            </a:r>
-            <a:r>
-              <a:rPr lang="en-US" altLang="ko-KR" sz="1300" dirty="0" err="1">
-                <a:solidFill>
-                  <a:srgbClr val="444444"/>
-                </a:solidFill>
-                <a:latin typeface="맑은 고딕" pitchFamily="34" charset="0"/>
-                <a:ea typeface="맑은 고딕" pitchFamily="34" charset="-122"/>
-                <a:cs typeface="맑은 고딕" pitchFamily="34" charset="-120"/>
-              </a:rPr>
-              <a:t>hongeunkyoung</a:t>
+              <a:t>HongEunKyeong</a:t>
             </a:r>
             <a:endParaRPr lang="en-US" sz="1300" dirty="0"/>
           </a:p>
